--- a/prezentacie/t05w.pptx
+++ b/prezentacie/t05w.pptx
@@ -252,7 +252,7 @@
           <a:p>
             <a:fld id="{10052495-8BC8-4CFB-94B1-B0429F101A0D}" type="datetimeFigureOut">
               <a:rPr lang="sk-SK" smtClean="0"/>
-              <a:t>25. 9. 2025</a:t>
+              <a:t>28. 9. 2026</a:t>
             </a:fld>
             <a:endParaRPr lang="sk-SK"/>
           </a:p>
@@ -422,7 +422,7 @@
           <a:p>
             <a:fld id="{10052495-8BC8-4CFB-94B1-B0429F101A0D}" type="datetimeFigureOut">
               <a:rPr lang="sk-SK" smtClean="0"/>
-              <a:t>25. 9. 2025</a:t>
+              <a:t>28. 9. 2026</a:t>
             </a:fld>
             <a:endParaRPr lang="sk-SK"/>
           </a:p>
@@ -602,7 +602,7 @@
           <a:p>
             <a:fld id="{10052495-8BC8-4CFB-94B1-B0429F101A0D}" type="datetimeFigureOut">
               <a:rPr lang="sk-SK" smtClean="0"/>
-              <a:t>25. 9. 2025</a:t>
+              <a:t>28. 9. 2026</a:t>
             </a:fld>
             <a:endParaRPr lang="sk-SK"/>
           </a:p>
@@ -772,7 +772,7 @@
           <a:p>
             <a:fld id="{10052495-8BC8-4CFB-94B1-B0429F101A0D}" type="datetimeFigureOut">
               <a:rPr lang="sk-SK" smtClean="0"/>
-              <a:t>25. 9. 2025</a:t>
+              <a:t>28. 9. 2026</a:t>
             </a:fld>
             <a:endParaRPr lang="sk-SK"/>
           </a:p>
@@ -1018,7 +1018,7 @@
           <a:p>
             <a:fld id="{10052495-8BC8-4CFB-94B1-B0429F101A0D}" type="datetimeFigureOut">
               <a:rPr lang="sk-SK" smtClean="0"/>
-              <a:t>25. 9. 2025</a:t>
+              <a:t>28. 9. 2026</a:t>
             </a:fld>
             <a:endParaRPr lang="sk-SK"/>
           </a:p>
@@ -1250,7 +1250,7 @@
           <a:p>
             <a:fld id="{10052495-8BC8-4CFB-94B1-B0429F101A0D}" type="datetimeFigureOut">
               <a:rPr lang="sk-SK" smtClean="0"/>
-              <a:t>25. 9. 2025</a:t>
+              <a:t>28. 9. 2026</a:t>
             </a:fld>
             <a:endParaRPr lang="sk-SK"/>
           </a:p>
@@ -1617,7 +1617,7 @@
           <a:p>
             <a:fld id="{10052495-8BC8-4CFB-94B1-B0429F101A0D}" type="datetimeFigureOut">
               <a:rPr lang="sk-SK" smtClean="0"/>
-              <a:t>25. 9. 2025</a:t>
+              <a:t>28. 9. 2026</a:t>
             </a:fld>
             <a:endParaRPr lang="sk-SK"/>
           </a:p>
@@ -1735,7 +1735,7 @@
           <a:p>
             <a:fld id="{10052495-8BC8-4CFB-94B1-B0429F101A0D}" type="datetimeFigureOut">
               <a:rPr lang="sk-SK" smtClean="0"/>
-              <a:t>25. 9. 2025</a:t>
+              <a:t>28. 9. 2026</a:t>
             </a:fld>
             <a:endParaRPr lang="sk-SK"/>
           </a:p>
@@ -1830,7 +1830,7 @@
           <a:p>
             <a:fld id="{10052495-8BC8-4CFB-94B1-B0429F101A0D}" type="datetimeFigureOut">
               <a:rPr lang="sk-SK" smtClean="0"/>
-              <a:t>25. 9. 2025</a:t>
+              <a:t>28. 9. 2026</a:t>
             </a:fld>
             <a:endParaRPr lang="sk-SK"/>
           </a:p>
@@ -2107,7 +2107,7 @@
           <a:p>
             <a:fld id="{10052495-8BC8-4CFB-94B1-B0429F101A0D}" type="datetimeFigureOut">
               <a:rPr lang="sk-SK" smtClean="0"/>
-              <a:t>25. 9. 2025</a:t>
+              <a:t>28. 9. 2026</a:t>
             </a:fld>
             <a:endParaRPr lang="sk-SK"/>
           </a:p>
@@ -2364,7 +2364,7 @@
           <a:p>
             <a:fld id="{10052495-8BC8-4CFB-94B1-B0429F101A0D}" type="datetimeFigureOut">
               <a:rPr lang="sk-SK" smtClean="0"/>
-              <a:t>25. 9. 2025</a:t>
+              <a:t>28. 9. 2026</a:t>
             </a:fld>
             <a:endParaRPr lang="sk-SK"/>
           </a:p>
@@ -2577,7 +2577,7 @@
           <a:p>
             <a:fld id="{10052495-8BC8-4CFB-94B1-B0429F101A0D}" type="datetimeFigureOut">
               <a:rPr lang="sk-SK" smtClean="0"/>
-              <a:t>25. 9. 2025</a:t>
+              <a:t>28. 9. 2026</a:t>
             </a:fld>
             <a:endParaRPr lang="sk-SK"/>
           </a:p>
@@ -3503,7 +3503,7 @@
             </a:br>
             <a:r>
               <a:rPr lang="sk-SK" b="1" dirty="0"/>
-              <a:t>Ing. Jozef Wagner PhD.</a:t>
+              <a:t>Ing. Jozef Wagner, PhD.</a:t>
             </a:r>
           </a:p>
           <a:p>
@@ -3651,11 +3651,25 @@
               <a:buNone/>
             </a:pPr>
             <a:r>
-              <a:rPr lang="sk-SK" i="1" dirty="0" err="1"/>
+              <a:rPr lang="sk-SK" i="1" dirty="0" err="1">
+                <a:solidFill>
+                  <a:srgbClr val="FF0000"/>
+                </a:solidFill>
+                <a:highlight>
+                  <a:srgbClr val="00FFFF"/>
+                </a:highlight>
+              </a:rPr>
               <a:t>try-with-resources</a:t>
             </a:r>
             <a:r>
-              <a:rPr lang="sk-SK" dirty="0"/>
+              <a:rPr lang="sk-SK" dirty="0">
+                <a:solidFill>
+                  <a:srgbClr val="FF0000"/>
+                </a:solidFill>
+                <a:highlight>
+                  <a:srgbClr val="00FFFF"/>
+                </a:highlight>
+              </a:rPr>
               <a:t> automatické zatvára zdroje</a:t>
             </a:r>
           </a:p>
@@ -3667,11 +3681,21 @@
               <a:buNone/>
             </a:pPr>
             <a:r>
-              <a:rPr lang="sk-SK" dirty="0"/>
-              <a:t>Zdroje, ktoré chcem zatvoriť, dám do zátvoriek hneď za príkazom </a:t>
+              <a:rPr lang="sk-SK" dirty="0">
+                <a:solidFill>
+                  <a:srgbClr val="FF0000"/>
+                </a:solidFill>
+                <a:highlight>
+                  <a:srgbClr val="00FFFF"/>
+                </a:highlight>
+              </a:rPr>
+              <a:t>Zdroje dám do zátvoriek hneď za príkazom </a:t>
             </a:r>
             <a:r>
               <a:rPr lang="sk-SK" dirty="0" err="1">
+                <a:solidFill>
+                  <a:srgbClr val="FF0000"/>
+                </a:solidFill>
                 <a:highlight>
                   <a:srgbClr val="FFFF00"/>
                 </a:highlight>
@@ -3679,7 +3703,14 @@
               </a:rPr>
               <a:t>try</a:t>
             </a:r>
-            <a:endParaRPr lang="sk-SK" dirty="0"/>
+            <a:endParaRPr lang="sk-SK" dirty="0">
+              <a:solidFill>
+                <a:srgbClr val="FF0000"/>
+              </a:solidFill>
+              <a:highlight>
+                <a:srgbClr val="FFFF00"/>
+              </a:highlight>
+            </a:endParaRPr>
           </a:p>
           <a:p>
             <a:pPr marL="0" indent="0">
@@ -3689,11 +3720,21 @@
               <a:buNone/>
             </a:pPr>
             <a:r>
-              <a:rPr lang="pl-PL" dirty="0"/>
+              <a:rPr lang="pl-PL" dirty="0">
+                <a:solidFill>
+                  <a:srgbClr val="FF0000"/>
+                </a:solidFill>
+                <a:highlight>
+                  <a:srgbClr val="00FFFF"/>
+                </a:highlight>
+              </a:rPr>
               <a:t>Je to lepšie ako použiť blok </a:t>
             </a:r>
             <a:r>
               <a:rPr lang="pl-PL" dirty="0">
+                <a:solidFill>
+                  <a:srgbClr val="FF0000"/>
+                </a:solidFill>
                 <a:highlight>
                   <a:srgbClr val="FFFF00"/>
                 </a:highlight>
@@ -4707,14 +4748,68 @@
           <a:lstStyle/>
           <a:p>
             <a:r>
-              <a:rPr lang="sk-SK" sz="4000" dirty="0"/>
-              <a:t>Výnimka - </a:t>
-            </a:r>
-            <a:r>
-              <a:rPr lang="sk-SK" sz="4000" dirty="0" err="1"/>
+              <a:rPr lang="sk-SK" sz="4000" dirty="0" err="1">
+                <a:solidFill>
+                  <a:srgbClr val="FF0000"/>
+                </a:solidFill>
+                <a:highlight>
+                  <a:srgbClr val="00FFFF"/>
+                </a:highlight>
+              </a:rPr>
+              <a:t>Výnimk</a:t>
+            </a:r>
+            <a:r>
+              <a:rPr lang="en-US" sz="4000" dirty="0">
+                <a:solidFill>
+                  <a:srgbClr val="FF0000"/>
+                </a:solidFill>
+                <a:highlight>
+                  <a:srgbClr val="00FFFF"/>
+                </a:highlight>
+              </a:rPr>
+              <a:t>y</a:t>
+            </a:r>
+            <a:r>
+              <a:rPr lang="sk-SK" sz="4000" dirty="0">
+                <a:solidFill>
+                  <a:srgbClr val="FF0000"/>
+                </a:solidFill>
+                <a:highlight>
+                  <a:srgbClr val="00FFFF"/>
+                </a:highlight>
+              </a:rPr>
+              <a:t> - </a:t>
+            </a:r>
+            <a:r>
+              <a:rPr lang="sk-SK" sz="4000" dirty="0" err="1">
+                <a:solidFill>
+                  <a:srgbClr val="FF0000"/>
+                </a:solidFill>
+                <a:highlight>
+                  <a:srgbClr val="00FFFF"/>
+                </a:highlight>
+              </a:rPr>
               <a:t>Exception</a:t>
             </a:r>
-            <a:endParaRPr lang="sk-SK" sz="4000" dirty="0"/>
+            <a:r>
+              <a:rPr lang="en-US" sz="4000">
+                <a:solidFill>
+                  <a:srgbClr val="FF0000"/>
+                </a:solidFill>
+                <a:highlight>
+                  <a:srgbClr val="00FFFF"/>
+                </a:highlight>
+              </a:rPr>
+              <a:t>s</a:t>
+            </a:r>
+            <a:endParaRPr lang="sk-SK" sz="4000" dirty="0">
+              <a:solidFill>
+                <a:srgbClr val="FF0000"/>
+              </a:solidFill>
+              <a:highlight>
+                <a:srgbClr val="00FFFF"/>
+              </a:highlight>
+            </a:endParaRPr>
           </a:p>
         </p:txBody>
       </p:sp>
@@ -4753,7 +4848,14 @@
               <a:buNone/>
             </a:pPr>
             <a:r>
-              <a:rPr lang="sk-SK" dirty="0"/>
+              <a:rPr lang="sk-SK" dirty="0">
+                <a:solidFill>
+                  <a:srgbClr val="FF0000"/>
+                </a:solidFill>
+                <a:highlight>
+                  <a:srgbClr val="00FFFF"/>
+                </a:highlight>
+              </a:rPr>
               <a:t>Výnimka je objekt, ktorý reprezentuje chybový alebo nečakaný stav počas behu programu</a:t>
             </a:r>
           </a:p>
@@ -4765,7 +4867,14 @@
               <a:buNone/>
             </a:pPr>
             <a:r>
-              <a:rPr lang="sk-SK" sz="2800" dirty="0"/>
+              <a:rPr lang="sk-SK" sz="2800" dirty="0">
+                <a:solidFill>
+                  <a:srgbClr val="FF0000"/>
+                </a:solidFill>
+                <a:highlight>
+                  <a:srgbClr val="00FFFF"/>
+                </a:highlight>
+              </a:rPr>
               <a:t>Ak nastane chyba, program 'vyhodí' výnimku</a:t>
             </a:r>
           </a:p>
@@ -4777,7 +4886,14 @@
               <a:buNone/>
             </a:pPr>
             <a:r>
-              <a:rPr lang="sk-SK" sz="2800" dirty="0"/>
+              <a:rPr lang="sk-SK" sz="2800" dirty="0">
+                <a:solidFill>
+                  <a:srgbClr val="FF0000"/>
+                </a:solidFill>
+                <a:highlight>
+                  <a:srgbClr val="00FFFF"/>
+                </a:highlight>
+              </a:rPr>
               <a:t>Vyhodená výnimka sa musí ošetriť v metóde, kde nastala, alebo v nadradených metódach</a:t>
             </a:r>
           </a:p>
@@ -4789,11 +4905,21 @@
               <a:buNone/>
             </a:pPr>
             <a:r>
-              <a:rPr lang="sk-SK" sz="2800" dirty="0"/>
+              <a:rPr lang="sk-SK" sz="2800" dirty="0">
+                <a:solidFill>
+                  <a:srgbClr val="FF0000"/>
+                </a:solidFill>
+                <a:highlight>
+                  <a:srgbClr val="00FFFF"/>
+                </a:highlight>
+              </a:rPr>
               <a:t>Ak sa neošetrí ani v </a:t>
             </a:r>
             <a:r>
               <a:rPr lang="sk-SK" dirty="0" err="1">
+                <a:solidFill>
+                  <a:srgbClr val="FF0000"/>
+                </a:solidFill>
                 <a:highlight>
                   <a:srgbClr val="FFFF00"/>
                 </a:highlight>
@@ -4803,6 +4929,9 @@
             </a:r>
             <a:r>
               <a:rPr lang="sk-SK" dirty="0">
+                <a:solidFill>
+                  <a:srgbClr val="FF0000"/>
+                </a:solidFill>
                 <a:highlight>
                   <a:srgbClr val="FFFF00"/>
                 </a:highlight>
@@ -4811,7 +4940,14 @@
               <a:t>()</a:t>
             </a:r>
             <a:r>
-              <a:rPr lang="sk-SK" sz="2800" dirty="0"/>
+              <a:rPr lang="sk-SK" sz="2800" dirty="0">
+                <a:solidFill>
+                  <a:srgbClr val="FF0000"/>
+                </a:solidFill>
+                <a:highlight>
+                  <a:srgbClr val="00FFFF"/>
+                </a:highlight>
+              </a:rPr>
               <a:t>, tak program skončí chybou</a:t>
             </a:r>
           </a:p>
@@ -4894,7 +5030,14 @@
           <a:lstStyle/>
           <a:p>
             <a:r>
-              <a:rPr lang="sk-SK" sz="4000" dirty="0"/>
+              <a:rPr lang="sk-SK" sz="4000" dirty="0">
+                <a:solidFill>
+                  <a:srgbClr val="FF0000"/>
+                </a:solidFill>
+                <a:highlight>
+                  <a:srgbClr val="00FFFF"/>
+                </a:highlight>
+              </a:rPr>
               <a:t>Kategórie výnimiek</a:t>
             </a:r>
           </a:p>
@@ -4936,11 +5079,25 @@
               <a:buAutoNum type="arabicPeriod"/>
             </a:pPr>
             <a:r>
-              <a:rPr lang="sk-SK" b="1" dirty="0" err="1"/>
+              <a:rPr lang="sk-SK" b="1" dirty="0" err="1">
+                <a:solidFill>
+                  <a:srgbClr val="FF0000"/>
+                </a:solidFill>
+                <a:highlight>
+                  <a:srgbClr val="00FFFF"/>
+                </a:highlight>
+              </a:rPr>
               <a:t>Errors</a:t>
             </a:r>
             <a:r>
-              <a:rPr lang="sk-SK" dirty="0"/>
+              <a:rPr lang="sk-SK" dirty="0">
+                <a:solidFill>
+                  <a:srgbClr val="FF0000"/>
+                </a:solidFill>
+                <a:highlight>
+                  <a:srgbClr val="00FFFF"/>
+                </a:highlight>
+              </a:rPr>
               <a:t> - Veľmi vážne chyby programu, neošetrujeme, program by sa mal ukončiť</a:t>
             </a:r>
           </a:p>
@@ -4953,23 +5110,58 @@
               <a:buAutoNum type="arabicPeriod"/>
             </a:pPr>
             <a:r>
-              <a:rPr lang="sk-SK" b="1" dirty="0" err="1"/>
+              <a:rPr lang="sk-SK" b="1" dirty="0" err="1">
+                <a:solidFill>
+                  <a:srgbClr val="FF0000"/>
+                </a:solidFill>
+                <a:highlight>
+                  <a:srgbClr val="00FFFF"/>
+                </a:highlight>
+              </a:rPr>
               <a:t>Unchecked</a:t>
             </a:r>
             <a:r>
-              <a:rPr lang="sk-SK" b="1" dirty="0"/>
+              <a:rPr lang="sk-SK" b="1" dirty="0">
+                <a:solidFill>
+                  <a:srgbClr val="FF0000"/>
+                </a:solidFill>
+                <a:highlight>
+                  <a:srgbClr val="00FFFF"/>
+                </a:highlight>
+              </a:rPr>
               <a:t> </a:t>
             </a:r>
             <a:r>
-              <a:rPr lang="sk-SK" b="1" dirty="0" err="1"/>
+              <a:rPr lang="sk-SK" b="1" dirty="0" err="1">
+                <a:solidFill>
+                  <a:srgbClr val="FF0000"/>
+                </a:solidFill>
+                <a:highlight>
+                  <a:srgbClr val="00FFFF"/>
+                </a:highlight>
+              </a:rPr>
               <a:t>Exceptions</a:t>
             </a:r>
             <a:r>
-              <a:rPr lang="sk-SK" b="1" dirty="0"/>
+              <a:rPr lang="sk-SK" b="1" dirty="0">
+                <a:solidFill>
+                  <a:srgbClr val="FF0000"/>
+                </a:solidFill>
+                <a:highlight>
+                  <a:srgbClr val="00FFFF"/>
+                </a:highlight>
+              </a:rPr>
               <a:t> </a:t>
             </a:r>
             <a:r>
-              <a:rPr lang="sk-SK" dirty="0"/>
+              <a:rPr lang="sk-SK" dirty="0">
+                <a:solidFill>
+                  <a:srgbClr val="FF0000"/>
+                </a:solidFill>
+                <a:highlight>
+                  <a:srgbClr val="00FFFF"/>
+                </a:highlight>
+              </a:rPr>
               <a:t>- Bežné chyby pri programovaní</a:t>
             </a:r>
           </a:p>
@@ -4982,24 +5174,63 @@
               <a:buAutoNum type="arabicPeriod"/>
             </a:pPr>
             <a:r>
-              <a:rPr lang="sk-SK" b="1" dirty="0" err="1"/>
+              <a:rPr lang="sk-SK" b="1" dirty="0" err="1">
+                <a:solidFill>
+                  <a:srgbClr val="FF0000"/>
+                </a:solidFill>
+                <a:highlight>
+                  <a:srgbClr val="00FFFF"/>
+                </a:highlight>
+              </a:rPr>
               <a:t>Checked</a:t>
             </a:r>
             <a:r>
-              <a:rPr lang="sk-SK" b="1" dirty="0"/>
+              <a:rPr lang="sk-SK" b="1" dirty="0">
+                <a:solidFill>
+                  <a:srgbClr val="FF0000"/>
+                </a:solidFill>
+                <a:highlight>
+                  <a:srgbClr val="00FFFF"/>
+                </a:highlight>
+              </a:rPr>
               <a:t> </a:t>
             </a:r>
             <a:r>
-              <a:rPr lang="sk-SK" b="1" dirty="0" err="1"/>
+              <a:rPr lang="sk-SK" b="1" dirty="0" err="1">
+                <a:solidFill>
+                  <a:srgbClr val="FF0000"/>
+                </a:solidFill>
+                <a:highlight>
+                  <a:srgbClr val="00FFFF"/>
+                </a:highlight>
+              </a:rPr>
               <a:t>Exceptions</a:t>
             </a:r>
             <a:r>
-              <a:rPr lang="sk-SK" b="1" dirty="0"/>
+              <a:rPr lang="sk-SK" b="1" dirty="0">
+                <a:solidFill>
+                  <a:srgbClr val="FF0000"/>
+                </a:solidFill>
+                <a:highlight>
+                  <a:srgbClr val="00FFFF"/>
+                </a:highlight>
+              </a:rPr>
               <a:t> </a:t>
             </a:r>
             <a:r>
+              <a:rPr lang="sk-SK" dirty="0">
+                <a:solidFill>
+                  <a:srgbClr val="FF0000"/>
+                </a:solidFill>
+                <a:highlight>
+                  <a:srgbClr val="00FFFF"/>
+                </a:highlight>
+              </a:rPr>
+              <a:t>- Vážnejšie chyby, ktoré musíme ošetriť</a:t>
+            </a:r>
+            <a:r>
               <a:rPr lang="sk-SK" dirty="0"/>
-              <a:t>- Vážnejšie chyby, ktoré musíme ošetriť, inak sa program ani neskompiluje a nespustí</a:t>
+              <a:t>, inak sa program ani neskompiluje a nespustí</a:t>
             </a:r>
           </a:p>
         </p:txBody>
@@ -5178,10 +5409,24 @@
           <a:lstStyle/>
           <a:p>
             <a:r>
-              <a:rPr lang="sk-SK" dirty="0"/>
+              <a:rPr lang="sk-SK" dirty="0">
+                <a:solidFill>
+                  <a:srgbClr val="FF0000"/>
+                </a:solidFill>
+                <a:highlight>
+                  <a:srgbClr val="00FFFF"/>
+                </a:highlight>
+              </a:rPr>
               <a:t>Zachytenie výnimiek</a:t>
             </a:r>
-            <a:endParaRPr lang="sk-SK" sz="4000" dirty="0"/>
+            <a:endParaRPr lang="sk-SK" sz="4000" dirty="0">
+              <a:solidFill>
+                <a:srgbClr val="FF0000"/>
+              </a:solidFill>
+              <a:highlight>
+                <a:srgbClr val="00FFFF"/>
+              </a:highlight>
+            </a:endParaRPr>
           </a:p>
         </p:txBody>
       </p:sp>
@@ -5217,15 +5462,36 @@
               <a:buNone/>
             </a:pPr>
             <a:r>
-              <a:rPr lang="sk-SK" dirty="0"/>
+              <a:rPr lang="sk-SK" dirty="0">
+                <a:solidFill>
+                  <a:srgbClr val="FF0000"/>
+                </a:solidFill>
+                <a:highlight>
+                  <a:srgbClr val="00FFFF"/>
+                </a:highlight>
+              </a:rPr>
               <a:t>Pomocou </a:t>
             </a:r>
             <a:r>
-              <a:rPr lang="sk-SK" dirty="0" err="1"/>
+              <a:rPr lang="sk-SK" dirty="0" err="1">
+                <a:solidFill>
+                  <a:srgbClr val="FF0000"/>
+                </a:solidFill>
+                <a:highlight>
+                  <a:srgbClr val="00FFFF"/>
+                </a:highlight>
+              </a:rPr>
               <a:t>try-catch</a:t>
             </a:r>
             <a:r>
-              <a:rPr lang="sk-SK" dirty="0"/>
+              <a:rPr lang="sk-SK" dirty="0">
+                <a:solidFill>
+                  <a:srgbClr val="FF0000"/>
+                </a:solidFill>
+                <a:highlight>
+                  <a:srgbClr val="00FFFF"/>
+                </a:highlight>
+              </a:rPr>
               <a:t> blokov</a:t>
             </a:r>
           </a:p>
@@ -5465,11 +5731,21 @@
               <a:buNone/>
             </a:pPr>
             <a:r>
-              <a:rPr lang="sk-SK" dirty="0"/>
+              <a:rPr lang="sk-SK" dirty="0">
+                <a:solidFill>
+                  <a:srgbClr val="FF0000"/>
+                </a:solidFill>
+                <a:highlight>
+                  <a:srgbClr val="00FFFF"/>
+                </a:highlight>
+              </a:rPr>
               <a:t>Nepovinný blok </a:t>
             </a:r>
             <a:r>
               <a:rPr lang="sk-SK" sz="2400" dirty="0" err="1">
+                <a:solidFill>
+                  <a:srgbClr val="FF0000"/>
+                </a:solidFill>
                 <a:highlight>
                   <a:srgbClr val="FFFF00"/>
                 </a:highlight>
@@ -5478,10 +5754,24 @@
               <a:t>finally</a:t>
             </a:r>
             <a:r>
-              <a:rPr lang="sk-SK" dirty="0"/>
+              <a:rPr lang="sk-SK" dirty="0">
+                <a:solidFill>
+                  <a:srgbClr val="FF0000"/>
+                </a:solidFill>
+                <a:highlight>
+                  <a:srgbClr val="00FFFF"/>
+                </a:highlight>
+              </a:rPr>
               <a:t> sa vykoná vždy, či nastala chyba alebo nie</a:t>
             </a:r>
-            <a:endParaRPr lang="sk-SK" sz="2800" dirty="0"/>
+            <a:endParaRPr lang="sk-SK" sz="2800" dirty="0">
+              <a:solidFill>
+                <a:srgbClr val="FF0000"/>
+              </a:solidFill>
+              <a:highlight>
+                <a:srgbClr val="00FFFF"/>
+              </a:highlight>
+            </a:endParaRPr>
           </a:p>
         </p:txBody>
       </p:sp>
@@ -6089,23 +6379,54 @@
               <a:buNone/>
             </a:pPr>
             <a:r>
-              <a:rPr lang="sk-SK" dirty="0"/>
+              <a:rPr lang="sk-SK" dirty="0">
+                <a:solidFill>
+                  <a:srgbClr val="FF0000"/>
+                </a:solidFill>
+                <a:highlight>
+                  <a:srgbClr val="00FFFF"/>
+                </a:highlight>
+              </a:rPr>
               <a:t>Neošetrené </a:t>
             </a:r>
             <a:r>
-              <a:rPr lang="sk-SK" b="1" dirty="0" err="1"/>
+              <a:rPr lang="sk-SK" b="1" dirty="0" err="1">
+                <a:solidFill>
+                  <a:srgbClr val="FF0000"/>
+                </a:solidFill>
+                <a:highlight>
+                  <a:srgbClr val="00FFFF"/>
+                </a:highlight>
+              </a:rPr>
               <a:t>checked</a:t>
             </a:r>
             <a:r>
-              <a:rPr lang="sk-SK" b="1" dirty="0"/>
+              <a:rPr lang="sk-SK" b="1" dirty="0">
+                <a:solidFill>
+                  <a:srgbClr val="FF0000"/>
+                </a:solidFill>
+                <a:highlight>
+                  <a:srgbClr val="00FFFF"/>
+                </a:highlight>
+              </a:rPr>
               <a:t> výnimky</a:t>
             </a:r>
             <a:r>
-              <a:rPr lang="sk-SK" dirty="0"/>
+              <a:rPr lang="sk-SK" dirty="0">
+                <a:solidFill>
+                  <a:srgbClr val="FF0000"/>
+                </a:solidFill>
+                <a:highlight>
+                  <a:srgbClr val="00FFFF"/>
+                </a:highlight>
+              </a:rPr>
               <a:t> musíme uviesť v deklarácii metódy pomocou </a:t>
             </a:r>
             <a:r>
               <a:rPr lang="sk-SK" dirty="0" err="1">
+                <a:solidFill>
+                  <a:srgbClr val="FF0000"/>
+                </a:solidFill>
                 <a:highlight>
                   <a:srgbClr val="FFFF00"/>
                 </a:highlight>
@@ -6114,6 +6435,9 @@
               <a:t>throws</a:t>
             </a:r>
             <a:endParaRPr lang="en-US" dirty="0">
+              <a:solidFill>
+                <a:srgbClr val="FF0000"/>
+              </a:solidFill>
               <a:highlight>
                 <a:srgbClr val="FFFF00"/>
               </a:highlight>
@@ -6520,11 +6844,21 @@
               <a:buNone/>
             </a:pPr>
             <a:r>
-              <a:rPr lang="sk-SK" dirty="0"/>
+              <a:rPr lang="sk-SK" dirty="0">
+                <a:solidFill>
+                  <a:srgbClr val="FF0000"/>
+                </a:solidFill>
+                <a:highlight>
+                  <a:srgbClr val="00FFFF"/>
+                </a:highlight>
+              </a:rPr>
               <a:t>Vyhadzovanie výnimiek robíme pomocou príkazu </a:t>
             </a:r>
             <a:r>
               <a:rPr lang="sk-SK" dirty="0" err="1">
+                <a:solidFill>
+                  <a:srgbClr val="FF0000"/>
+                </a:solidFill>
                 <a:highlight>
                   <a:srgbClr val="FFFF00"/>
                 </a:highlight>
@@ -6533,6 +6867,9 @@
               <a:t>throw</a:t>
             </a:r>
             <a:endParaRPr lang="en-US" dirty="0">
+              <a:solidFill>
+                <a:srgbClr val="FF0000"/>
+              </a:solidFill>
               <a:highlight>
                 <a:srgbClr val="FFFF00"/>
               </a:highlight>
@@ -6550,12 +6887,22 @@
               <a:buNone/>
             </a:pPr>
             <a:r>
-              <a:rPr lang="sk-SK" dirty="0"/>
+              <a:rPr lang="sk-SK" dirty="0">
+                <a:solidFill>
+                  <a:srgbClr val="FF0000"/>
+                </a:solidFill>
+                <a:highlight>
+                  <a:srgbClr val="00FFFF"/>
+                </a:highlight>
+              </a:rPr>
               <a:t>Pri vytváraní výnimky je vhodné uviesť krátku správu, aká chyba nastala</a:t>
             </a:r>
             <a:endParaRPr lang="en-US" dirty="0">
+              <a:solidFill>
+                <a:srgbClr val="FF0000"/>
+              </a:solidFill>
               <a:highlight>
-                <a:srgbClr val="FFFF00"/>
+                <a:srgbClr val="00FFFF"/>
               </a:highlight>
               <a:latin typeface="Consolas" panose="020B0609020204030204" pitchFamily="49" charset="0"/>
             </a:endParaRPr>
